--- a/Power_BI/cria_bg.pptx
+++ b/Power_BI/cria_bg.pptx
@@ -6,6 +6,7 @@
   </p:sldMasterIdLst>
   <p:sldIdLst>
     <p:sldId id="256" r:id="rId2"/>
+    <p:sldId id="257" r:id="rId3"/>
   </p:sldIdLst>
   <p:sldSz cx="12192000" cy="6858000"/>
   <p:notesSz cx="6858000" cy="9144000"/>
@@ -104,7 +105,56 @@
       </a:defRPr>
     </a:lvl9pPr>
   </p:defaultTextStyle>
+  <p:extLst>
+    <p:ext uri="{EFAFB233-063F-42B5-8137-9DF3F51BA10A}">
+      <p15:sldGuideLst xmlns:p15="http://schemas.microsoft.com/office/powerpoint/2012/main"/>
+    </p:ext>
+  </p:extLst>
 </p:presentation>
+</file>
+
+<file path=ppt/changesInfos/changesInfo1.xml><?xml version="1.0" encoding="utf-8"?>
+<pc:chgInfo xmlns:a="http://schemas.openxmlformats.org/drawingml/2006/main" xmlns:r="http://schemas.openxmlformats.org/officeDocument/2006/relationships" xmlns:ac="http://schemas.microsoft.com/office/drawing/2013/main/command" xmlns:pc="http://schemas.microsoft.com/office/powerpoint/2013/main/command">
+  <pc:docChgLst>
+    <pc:chgData name="Vinícius Almeida Barros (SFG)" userId="b08a256a-b48c-4eed-89e0-b74b71690a9c" providerId="ADAL" clId="{B3C9FB91-ECA8-4B56-A6C8-9107A559FA23}"/>
+    <pc:docChg chg="modSld">
+      <pc:chgData name="Vinícius Almeida Barros (SFG)" userId="b08a256a-b48c-4eed-89e0-b74b71690a9c" providerId="ADAL" clId="{B3C9FB91-ECA8-4B56-A6C8-9107A559FA23}" dt="2022-05-16T14:51:19.806" v="7" actId="1076"/>
+      <pc:docMkLst>
+        <pc:docMk/>
+      </pc:docMkLst>
+      <pc:sldChg chg="modSp mod">
+        <pc:chgData name="Vinícius Almeida Barros (SFG)" userId="b08a256a-b48c-4eed-89e0-b74b71690a9c" providerId="ADAL" clId="{B3C9FB91-ECA8-4B56-A6C8-9107A559FA23}" dt="2022-05-16T14:51:19.806" v="7" actId="1076"/>
+        <pc:sldMkLst>
+          <pc:docMk/>
+          <pc:sldMk cId="1463415353" sldId="256"/>
+        </pc:sldMkLst>
+        <pc:spChg chg="mod">
+          <ac:chgData name="Vinícius Almeida Barros (SFG)" userId="b08a256a-b48c-4eed-89e0-b74b71690a9c" providerId="ADAL" clId="{B3C9FB91-ECA8-4B56-A6C8-9107A559FA23}" dt="2022-05-16T14:51:19.806" v="7" actId="1076"/>
+          <ac:spMkLst>
+            <pc:docMk/>
+            <pc:sldMk cId="1463415353" sldId="256"/>
+            <ac:spMk id="7" creationId="{26EB7834-A154-D1EA-C888-2517C28D1329}"/>
+          </ac:spMkLst>
+        </pc:spChg>
+      </pc:sldChg>
+      <pc:sldChg chg="modSp mod">
+        <pc:chgData name="Vinícius Almeida Barros (SFG)" userId="b08a256a-b48c-4eed-89e0-b74b71690a9c" providerId="ADAL" clId="{B3C9FB91-ECA8-4B56-A6C8-9107A559FA23}" dt="2022-05-16T14:51:11.544" v="4" actId="122"/>
+        <pc:sldMkLst>
+          <pc:docMk/>
+          <pc:sldMk cId="3736791195" sldId="257"/>
+        </pc:sldMkLst>
+        <pc:spChg chg="mod">
+          <ac:chgData name="Vinícius Almeida Barros (SFG)" userId="b08a256a-b48c-4eed-89e0-b74b71690a9c" providerId="ADAL" clId="{B3C9FB91-ECA8-4B56-A6C8-9107A559FA23}" dt="2022-05-16T14:51:11.544" v="4" actId="122"/>
+          <ac:spMkLst>
+            <pc:docMk/>
+            <pc:sldMk cId="3736791195" sldId="257"/>
+            <ac:spMk id="7" creationId="{26EB7834-A154-D1EA-C888-2517C28D1329}"/>
+          </ac:spMkLst>
+        </pc:spChg>
+      </pc:sldChg>
+    </pc:docChg>
+  </pc:docChgLst>
+</pc:chgInfo>
 </file>
 
 <file path=ppt/slideLayouts/slideLayout1.xml><?xml version="1.0" encoding="utf-8"?>
@@ -254,7 +304,7 @@
           <a:p>
             <a:fld id="{1013E7CE-B5DD-4266-8D88-BE38E9E3F3D6}" type="datetimeFigureOut">
               <a:rPr lang="pt-BR" smtClean="0"/>
-              <a:t>08/05/2022</a:t>
+              <a:t>16/05/2022</a:t>
             </a:fld>
             <a:endParaRPr lang="pt-BR"/>
           </a:p>
@@ -452,7 +502,7 @@
           <a:p>
             <a:fld id="{1013E7CE-B5DD-4266-8D88-BE38E9E3F3D6}" type="datetimeFigureOut">
               <a:rPr lang="pt-BR" smtClean="0"/>
-              <a:t>08/05/2022</a:t>
+              <a:t>16/05/2022</a:t>
             </a:fld>
             <a:endParaRPr lang="pt-BR"/>
           </a:p>
@@ -660,7 +710,7 @@
           <a:p>
             <a:fld id="{1013E7CE-B5DD-4266-8D88-BE38E9E3F3D6}" type="datetimeFigureOut">
               <a:rPr lang="pt-BR" smtClean="0"/>
-              <a:t>08/05/2022</a:t>
+              <a:t>16/05/2022</a:t>
             </a:fld>
             <a:endParaRPr lang="pt-BR"/>
           </a:p>
@@ -858,7 +908,7 @@
           <a:p>
             <a:fld id="{1013E7CE-B5DD-4266-8D88-BE38E9E3F3D6}" type="datetimeFigureOut">
               <a:rPr lang="pt-BR" smtClean="0"/>
-              <a:t>08/05/2022</a:t>
+              <a:t>16/05/2022</a:t>
             </a:fld>
             <a:endParaRPr lang="pt-BR"/>
           </a:p>
@@ -1133,7 +1183,7 @@
           <a:p>
             <a:fld id="{1013E7CE-B5DD-4266-8D88-BE38E9E3F3D6}" type="datetimeFigureOut">
               <a:rPr lang="pt-BR" smtClean="0"/>
-              <a:t>08/05/2022</a:t>
+              <a:t>16/05/2022</a:t>
             </a:fld>
             <a:endParaRPr lang="pt-BR"/>
           </a:p>
@@ -1398,7 +1448,7 @@
           <a:p>
             <a:fld id="{1013E7CE-B5DD-4266-8D88-BE38E9E3F3D6}" type="datetimeFigureOut">
               <a:rPr lang="pt-BR" smtClean="0"/>
-              <a:t>08/05/2022</a:t>
+              <a:t>16/05/2022</a:t>
             </a:fld>
             <a:endParaRPr lang="pt-BR"/>
           </a:p>
@@ -1810,7 +1860,7 @@
           <a:p>
             <a:fld id="{1013E7CE-B5DD-4266-8D88-BE38E9E3F3D6}" type="datetimeFigureOut">
               <a:rPr lang="pt-BR" smtClean="0"/>
-              <a:t>08/05/2022</a:t>
+              <a:t>16/05/2022</a:t>
             </a:fld>
             <a:endParaRPr lang="pt-BR"/>
           </a:p>
@@ -1951,7 +2001,7 @@
           <a:p>
             <a:fld id="{1013E7CE-B5DD-4266-8D88-BE38E9E3F3D6}" type="datetimeFigureOut">
               <a:rPr lang="pt-BR" smtClean="0"/>
-              <a:t>08/05/2022</a:t>
+              <a:t>16/05/2022</a:t>
             </a:fld>
             <a:endParaRPr lang="pt-BR"/>
           </a:p>
@@ -2064,7 +2114,7 @@
           <a:p>
             <a:fld id="{1013E7CE-B5DD-4266-8D88-BE38E9E3F3D6}" type="datetimeFigureOut">
               <a:rPr lang="pt-BR" smtClean="0"/>
-              <a:t>08/05/2022</a:t>
+              <a:t>16/05/2022</a:t>
             </a:fld>
             <a:endParaRPr lang="pt-BR"/>
           </a:p>
@@ -2375,7 +2425,7 @@
           <a:p>
             <a:fld id="{1013E7CE-B5DD-4266-8D88-BE38E9E3F3D6}" type="datetimeFigureOut">
               <a:rPr lang="pt-BR" smtClean="0"/>
-              <a:t>08/05/2022</a:t>
+              <a:t>16/05/2022</a:t>
             </a:fld>
             <a:endParaRPr lang="pt-BR"/>
           </a:p>
@@ -2663,7 +2713,7 @@
           <a:p>
             <a:fld id="{1013E7CE-B5DD-4266-8D88-BE38E9E3F3D6}" type="datetimeFigureOut">
               <a:rPr lang="pt-BR" smtClean="0"/>
-              <a:t>08/05/2022</a:t>
+              <a:t>16/05/2022</a:t>
             </a:fld>
             <a:endParaRPr lang="pt-BR"/>
           </a:p>
@@ -2904,7 +2954,7 @@
           <a:p>
             <a:fld id="{1013E7CE-B5DD-4266-8D88-BE38E9E3F3D6}" type="datetimeFigureOut">
               <a:rPr lang="pt-BR" smtClean="0"/>
-              <a:t>08/05/2022</a:t>
+              <a:t>16/05/2022</a:t>
             </a:fld>
             <a:endParaRPr lang="pt-BR"/>
           </a:p>
@@ -3323,10 +3373,10 @@
       </p:grpSpPr>
       <p:pic>
         <p:nvPicPr>
-          <p:cNvPr id="5" name="Imagem 4">
-            <a:extLst>
-              <a:ext uri="{FF2B5EF4-FFF2-40B4-BE49-F238E27FC236}">
-                <a16:creationId xmlns:a16="http://schemas.microsoft.com/office/drawing/2014/main" id="{B42D2D96-9D1F-B84F-F1BC-4804307361A6}"/>
+          <p:cNvPr id="3" name="Imagem 2" descr="Logotipo&#10;&#10;Descrição gerada automaticamente">
+            <a:extLst>
+              <a:ext uri="{FF2B5EF4-FFF2-40B4-BE49-F238E27FC236}">
+                <a16:creationId xmlns:a16="http://schemas.microsoft.com/office/drawing/2014/main" id="{D190D2C5-75A6-ABC3-A7D0-BEBBC019C521}"/>
               </a:ext>
             </a:extLst>
           </p:cNvPr>
@@ -3349,8 +3399,8 @@
         </p:blipFill>
         <p:spPr>
           <a:xfrm>
-            <a:off x="0" y="-3517"/>
-            <a:ext cx="12192000" cy="800100"/>
+            <a:off x="874132" y="395800"/>
+            <a:ext cx="1799795" cy="316764"/>
           </a:xfrm>
           <a:prstGeom prst="rect">
             <a:avLst/>
@@ -3359,48 +3409,74 @@
       </p:pic>
       <p:sp>
         <p:nvSpPr>
-          <p:cNvPr id="6" name="CaixaDeTexto 5">
-            <a:extLst>
-              <a:ext uri="{FF2B5EF4-FFF2-40B4-BE49-F238E27FC236}">
-                <a16:creationId xmlns:a16="http://schemas.microsoft.com/office/drawing/2014/main" id="{53F4F0DA-15AE-DABE-848C-0E3BC29252B9}"/>
-              </a:ext>
-            </a:extLst>
-          </p:cNvPr>
-          <p:cNvSpPr txBox="1"/>
+          <p:cNvPr id="4" name="Retângulo: Cantos Arredondados 3">
+            <a:extLst>
+              <a:ext uri="{FF2B5EF4-FFF2-40B4-BE49-F238E27FC236}">
+                <a16:creationId xmlns:a16="http://schemas.microsoft.com/office/drawing/2014/main" id="{1A691D11-0D11-ECF6-8EB4-69C2645D9820}"/>
+              </a:ext>
+            </a:extLst>
+          </p:cNvPr>
+          <p:cNvSpPr/>
           <p:nvPr/>
         </p:nvSpPr>
         <p:spPr>
           <a:xfrm>
-            <a:off x="3491345" y="134923"/>
-            <a:ext cx="5209310" cy="523220"/>
+            <a:off x="327476" y="110837"/>
+            <a:ext cx="11537047" cy="886690"/>
           </a:xfrm>
-          <a:prstGeom prst="rect">
+          <a:prstGeom prst="roundRect">
             <a:avLst/>
           </a:prstGeom>
-          <a:solidFill>
-            <a:schemeClr val="accent5">
-              <a:alpha val="50000"/>
-            </a:schemeClr>
-          </a:solidFill>
-          <a:ln>
-            <a:noFill/>
-          </a:ln>
+          <a:noFill/>
         </p:spPr>
         <p:style>
-          <a:lnRef idx="0">
-            <a:scrgbClr r="0" g="0" b="0"/>
+          <a:lnRef idx="2">
+            <a:schemeClr val="accent1">
+              <a:shade val="50000"/>
+            </a:schemeClr>
           </a:lnRef>
-          <a:fillRef idx="0">
-            <a:scrgbClr r="0" g="0" b="0"/>
+          <a:fillRef idx="1">
+            <a:schemeClr val="accent1"/>
           </a:fillRef>
           <a:effectRef idx="0">
-            <a:scrgbClr r="0" g="0" b="0"/>
+            <a:schemeClr val="accent1"/>
           </a:effectRef>
           <a:fontRef idx="minor">
             <a:schemeClr val="lt1"/>
           </a:fontRef>
         </p:style>
         <p:txBody>
+          <a:bodyPr rtlCol="0" anchor="ctr"/>
+          <a:lstStyle/>
+          <a:p>
+            <a:pPr algn="ctr"/>
+            <a:endParaRPr lang="pt-BR"/>
+          </a:p>
+        </p:txBody>
+      </p:sp>
+      <p:sp>
+        <p:nvSpPr>
+          <p:cNvPr id="7" name="CaixaDeTexto 6">
+            <a:extLst>
+              <a:ext uri="{FF2B5EF4-FFF2-40B4-BE49-F238E27FC236}">
+                <a16:creationId xmlns:a16="http://schemas.microsoft.com/office/drawing/2014/main" id="{26EB7834-A154-D1EA-C888-2517C28D1329}"/>
+              </a:ext>
+            </a:extLst>
+          </p:cNvPr>
+          <p:cNvSpPr txBox="1"/>
+          <p:nvPr/>
+        </p:nvSpPr>
+        <p:spPr>
+          <a:xfrm>
+            <a:off x="4475016" y="200239"/>
+            <a:ext cx="3241965" cy="707886"/>
+          </a:xfrm>
+          <a:prstGeom prst="rect">
+            <a:avLst/>
+          </a:prstGeom>
+          <a:noFill/>
+        </p:spPr>
+        <p:txBody>
           <a:bodyPr wrap="square" rtlCol="0">
             <a:spAutoFit/>
           </a:bodyPr>
@@ -3408,14 +3484,76 @@
           <a:p>
             <a:pPr algn="ctr"/>
             <a:r>
-              <a:rPr lang="pt-BR" sz="2800" b="1" dirty="0">
+              <a:rPr lang="pt-BR" sz="2000" b="1" dirty="0">
                 <a:solidFill>
-                  <a:schemeClr val="accent1">
-                    <a:lumMod val="50000"/>
+                  <a:srgbClr val="002060"/>
+                </a:solidFill>
+              </a:rPr>
+              <a:t>Painel de acompanhamento  </a:t>
+            </a:r>
+          </a:p>
+          <a:p>
+            <a:pPr algn="ctr"/>
+            <a:r>
+              <a:rPr lang="pt-BR" sz="2000" dirty="0">
+                <a:solidFill>
+                  <a:srgbClr val="002060"/>
+                </a:solidFill>
+              </a:rPr>
+              <a:t>Receita verificada das usinas</a:t>
+            </a:r>
+          </a:p>
+        </p:txBody>
+      </p:sp>
+      <p:sp>
+        <p:nvSpPr>
+          <p:cNvPr id="8" name="CaixaDeTexto 7">
+            <a:extLst>
+              <a:ext uri="{FF2B5EF4-FFF2-40B4-BE49-F238E27FC236}">
+                <a16:creationId xmlns:a16="http://schemas.microsoft.com/office/drawing/2014/main" id="{160136D4-4046-E92F-5612-214DAA0E4EE1}"/>
+              </a:ext>
+            </a:extLst>
+          </p:cNvPr>
+          <p:cNvSpPr txBox="1"/>
+          <p:nvPr/>
+        </p:nvSpPr>
+        <p:spPr>
+          <a:xfrm>
+            <a:off x="327476" y="6536368"/>
+            <a:ext cx="10182445" cy="307777"/>
+          </a:xfrm>
+          <a:prstGeom prst="rect">
+            <a:avLst/>
+          </a:prstGeom>
+          <a:noFill/>
+        </p:spPr>
+        <p:txBody>
+          <a:bodyPr wrap="square" rtlCol="0">
+            <a:spAutoFit/>
+          </a:bodyPr>
+          <a:lstStyle/>
+          <a:p>
+            <a:r>
+              <a:rPr lang="pt-BR" sz="1400" b="1" dirty="0">
+                <a:solidFill>
+                  <a:schemeClr val="tx1">
+                    <a:lumMod val="95000"/>
+                    <a:lumOff val="5000"/>
                   </a:schemeClr>
                 </a:solidFill>
               </a:rPr>
-              <a:t>Receita das Usinas: 2020 a 2021</a:t>
+              <a:t>Fonte de dados: </a:t>
+            </a:r>
+            <a:r>
+              <a:rPr lang="pt-BR" sz="1400" dirty="0">
+                <a:solidFill>
+                  <a:schemeClr val="tx1">
+                    <a:lumMod val="95000"/>
+                    <a:lumOff val="5000"/>
+                  </a:schemeClr>
+                </a:solidFill>
+              </a:rPr>
+              <a:t>https://www.ccee.org.br/web/guest/mercado/leilao-mercado</a:t>
             </a:r>
           </a:p>
         </p:txBody>
@@ -3424,6 +3562,223 @@
     <p:extLst>
       <p:ext uri="{BB962C8B-B14F-4D97-AF65-F5344CB8AC3E}">
         <p14:creationId xmlns:p14="http://schemas.microsoft.com/office/powerpoint/2010/main" val="1463415353"/>
+      </p:ext>
+    </p:extLst>
+  </p:cSld>
+  <p:clrMapOvr>
+    <a:masterClrMapping/>
+  </p:clrMapOvr>
+</p:sld>
+</file>
+
+<file path=ppt/slides/slide2.xml><?xml version="1.0" encoding="utf-8"?>
+<p:sld xmlns:a="http://schemas.openxmlformats.org/drawingml/2006/main" xmlns:r="http://schemas.openxmlformats.org/officeDocument/2006/relationships" xmlns:p="http://schemas.openxmlformats.org/presentationml/2006/main">
+  <p:cSld>
+    <p:spTree>
+      <p:nvGrpSpPr>
+        <p:cNvPr id="1" name=""/>
+        <p:cNvGrpSpPr/>
+        <p:nvPr/>
+      </p:nvGrpSpPr>
+      <p:grpSpPr>
+        <a:xfrm>
+          <a:off x="0" y="0"/>
+          <a:ext cx="0" cy="0"/>
+          <a:chOff x="0" y="0"/>
+          <a:chExt cx="0" cy="0"/>
+        </a:xfrm>
+      </p:grpSpPr>
+      <p:pic>
+        <p:nvPicPr>
+          <p:cNvPr id="3" name="Imagem 2" descr="Logotipo&#10;&#10;Descrição gerada automaticamente">
+            <a:extLst>
+              <a:ext uri="{FF2B5EF4-FFF2-40B4-BE49-F238E27FC236}">
+                <a16:creationId xmlns:a16="http://schemas.microsoft.com/office/drawing/2014/main" id="{D190D2C5-75A6-ABC3-A7D0-BEBBC019C521}"/>
+              </a:ext>
+            </a:extLst>
+          </p:cNvPr>
+          <p:cNvPicPr>
+            <a:picLocks noChangeAspect="1"/>
+          </p:cNvPicPr>
+          <p:nvPr/>
+        </p:nvPicPr>
+        <p:blipFill>
+          <a:blip r:embed="rId2">
+            <a:extLst>
+              <a:ext uri="{28A0092B-C50C-407E-A947-70E740481C1C}">
+                <a14:useLocalDpi xmlns:a14="http://schemas.microsoft.com/office/drawing/2010/main" val="0"/>
+              </a:ext>
+            </a:extLst>
+          </a:blip>
+          <a:stretch>
+            <a:fillRect/>
+          </a:stretch>
+        </p:blipFill>
+        <p:spPr>
+          <a:xfrm>
+            <a:off x="874132" y="395800"/>
+            <a:ext cx="1799795" cy="316764"/>
+          </a:xfrm>
+          <a:prstGeom prst="rect">
+            <a:avLst/>
+          </a:prstGeom>
+        </p:spPr>
+      </p:pic>
+      <p:sp>
+        <p:nvSpPr>
+          <p:cNvPr id="4" name="Retângulo: Cantos Arredondados 3">
+            <a:extLst>
+              <a:ext uri="{FF2B5EF4-FFF2-40B4-BE49-F238E27FC236}">
+                <a16:creationId xmlns:a16="http://schemas.microsoft.com/office/drawing/2014/main" id="{1A691D11-0D11-ECF6-8EB4-69C2645D9820}"/>
+              </a:ext>
+            </a:extLst>
+          </p:cNvPr>
+          <p:cNvSpPr/>
+          <p:nvPr/>
+        </p:nvSpPr>
+        <p:spPr>
+          <a:xfrm>
+            <a:off x="327476" y="110837"/>
+            <a:ext cx="11537047" cy="886690"/>
+          </a:xfrm>
+          <a:prstGeom prst="roundRect">
+            <a:avLst/>
+          </a:prstGeom>
+          <a:noFill/>
+        </p:spPr>
+        <p:style>
+          <a:lnRef idx="2">
+            <a:schemeClr val="accent1">
+              <a:shade val="50000"/>
+            </a:schemeClr>
+          </a:lnRef>
+          <a:fillRef idx="1">
+            <a:schemeClr val="accent1"/>
+          </a:fillRef>
+          <a:effectRef idx="0">
+            <a:schemeClr val="accent1"/>
+          </a:effectRef>
+          <a:fontRef idx="minor">
+            <a:schemeClr val="lt1"/>
+          </a:fontRef>
+        </p:style>
+        <p:txBody>
+          <a:bodyPr rtlCol="0" anchor="ctr"/>
+          <a:lstStyle/>
+          <a:p>
+            <a:pPr algn="ctr"/>
+            <a:endParaRPr lang="pt-BR"/>
+          </a:p>
+        </p:txBody>
+      </p:sp>
+      <p:sp>
+        <p:nvSpPr>
+          <p:cNvPr id="7" name="CaixaDeTexto 6">
+            <a:extLst>
+              <a:ext uri="{FF2B5EF4-FFF2-40B4-BE49-F238E27FC236}">
+                <a16:creationId xmlns:a16="http://schemas.microsoft.com/office/drawing/2014/main" id="{26EB7834-A154-D1EA-C888-2517C28D1329}"/>
+              </a:ext>
+            </a:extLst>
+          </p:cNvPr>
+          <p:cNvSpPr txBox="1"/>
+          <p:nvPr/>
+        </p:nvSpPr>
+        <p:spPr>
+          <a:xfrm>
+            <a:off x="3782289" y="200239"/>
+            <a:ext cx="4627420" cy="707886"/>
+          </a:xfrm>
+          <a:prstGeom prst="rect">
+            <a:avLst/>
+          </a:prstGeom>
+          <a:noFill/>
+        </p:spPr>
+        <p:txBody>
+          <a:bodyPr wrap="square" rtlCol="0">
+            <a:spAutoFit/>
+          </a:bodyPr>
+          <a:lstStyle/>
+          <a:p>
+            <a:pPr algn="ctr"/>
+            <a:r>
+              <a:rPr lang="pt-BR" sz="2000" b="1" dirty="0">
+                <a:solidFill>
+                  <a:srgbClr val="002060"/>
+                </a:solidFill>
+              </a:rPr>
+              <a:t>Receita verificada das usinas</a:t>
+            </a:r>
+          </a:p>
+          <a:p>
+            <a:pPr algn="ctr"/>
+            <a:r>
+              <a:rPr lang="pt-BR" sz="2000" dirty="0">
+                <a:solidFill>
+                  <a:srgbClr val="002060"/>
+                </a:solidFill>
+              </a:rPr>
+              <a:t>Base CCEE</a:t>
+            </a:r>
+          </a:p>
+        </p:txBody>
+      </p:sp>
+      <p:sp>
+        <p:nvSpPr>
+          <p:cNvPr id="8" name="CaixaDeTexto 7">
+            <a:extLst>
+              <a:ext uri="{FF2B5EF4-FFF2-40B4-BE49-F238E27FC236}">
+                <a16:creationId xmlns:a16="http://schemas.microsoft.com/office/drawing/2014/main" id="{160136D4-4046-E92F-5612-214DAA0E4EE1}"/>
+              </a:ext>
+            </a:extLst>
+          </p:cNvPr>
+          <p:cNvSpPr txBox="1"/>
+          <p:nvPr/>
+        </p:nvSpPr>
+        <p:spPr>
+          <a:xfrm>
+            <a:off x="327476" y="6536368"/>
+            <a:ext cx="10182445" cy="307777"/>
+          </a:xfrm>
+          <a:prstGeom prst="rect">
+            <a:avLst/>
+          </a:prstGeom>
+          <a:noFill/>
+        </p:spPr>
+        <p:txBody>
+          <a:bodyPr wrap="square" rtlCol="0">
+            <a:spAutoFit/>
+          </a:bodyPr>
+          <a:lstStyle/>
+          <a:p>
+            <a:r>
+              <a:rPr lang="pt-BR" sz="1400" b="1" dirty="0">
+                <a:solidFill>
+                  <a:schemeClr val="tx1">
+                    <a:lumMod val="95000"/>
+                    <a:lumOff val="5000"/>
+                  </a:schemeClr>
+                </a:solidFill>
+              </a:rPr>
+              <a:t>Fonte de dados: </a:t>
+            </a:r>
+            <a:r>
+              <a:rPr lang="pt-BR" sz="1400" dirty="0">
+                <a:solidFill>
+                  <a:schemeClr val="tx1">
+                    <a:lumMod val="95000"/>
+                    <a:lumOff val="5000"/>
+                  </a:schemeClr>
+                </a:solidFill>
+              </a:rPr>
+              <a:t>https://www.ccee.org.br/web/guest/mercado/leilao-mercado</a:t>
+            </a:r>
+          </a:p>
+        </p:txBody>
+      </p:sp>
+    </p:spTree>
+    <p:extLst>
+      <p:ext uri="{BB962C8B-B14F-4D97-AF65-F5344CB8AC3E}">
+        <p14:creationId xmlns:p14="http://schemas.microsoft.com/office/powerpoint/2010/main" val="3736791195"/>
       </p:ext>
     </p:extLst>
   </p:cSld>
